--- a/tests/Lokad.OoxPdf.Tests/Cases/pptx-ladder-04-typography-noautofit-cambria-fit-probe.pptx
+++ b/tests/Lokad.OoxPdf.Tests/Cases/pptx-ladder-04-typography-noautofit-cambria-fit-probe.pptx
@@ -3359,10 +3359,10 @@
             </a:pPr>
             <a:r>
               <a:rPr lang="en-US" sz="1800">
-                <a:latin typeface="Cambria Math"/>
                 <a:highlight>
                   <a:srgbClr val="FFFF00"/>
                 </a:highlight>
+                <a:latin typeface="Cambria Math"/>
               </a:rPr>
               <a:t>Careful planning </a:t>
             </a:r>
